--- a/docs/strategy/diary/manufacturer-handoff-v1.4/02_concept_deck.pptx
+++ b/docs/strategy/diary/manufacturer-handoff-v1.4/02_concept_deck.pptx
@@ -3118,7 +3118,7 @@
             <a:avLst/>
           </a:prstGeom>
           <a:solidFill>
-            <a:srgbClr val="1A2B4A"/>
+            <a:srgbClr val="0A3D2A"/>
           </a:solidFill>
           <a:ln>
             <a:noFill/>
@@ -3288,7 +3288,7 @@
         <p:spPr>
           <a:xfrm>
             <a:off x="731520" y="2926080"/>
-            <a:ext cx="10515600" cy="457200"/>
+            <a:ext cx="10515600" cy="548640"/>
           </a:xfrm>
           <a:prstGeom prst="rect">
             <a:avLst/>
@@ -3307,14 +3307,14 @@
               </a:lnSpc>
             </a:pPr>
             <a:r>
-              <a:rPr sz="1800" b="1">
+              <a:rPr sz="2200" b="0">
                 <a:solidFill>
                   <a:srgbClr val="C9A04F"/>
                 </a:solidFill>
-                <a:latin typeface="Noto Sans CJK KR"/>
-                <a:ea typeface="Noto Sans CJK KR"/>
-              </a:rPr>
-              <a:t>LIFE · PORTFOLIO</a:t>
+                <a:latin typeface="Cormorant Garamond"/>
+                <a:ea typeface="Noto Sans CJK KR"/>
+              </a:rPr>
+              <a:t>LIFE  PORTFOLIO</a:t>
             </a:r>
           </a:p>
         </p:txBody>
@@ -3412,7 +3412,7 @@
         <p:spPr>
           <a:xfrm>
             <a:off x="731520" y="5074920"/>
-            <a:ext cx="10515600" cy="548640"/>
+            <a:ext cx="10515600" cy="640080"/>
           </a:xfrm>
           <a:prstGeom prst="rect">
             <a:avLst/>
@@ -3431,11 +3431,11 @@
               </a:lnSpc>
             </a:pPr>
             <a:r>
-              <a:rPr sz="2600" b="0">
+              <a:rPr sz="2800" b="0" i="1">
                 <a:solidFill>
                   <a:srgbClr val="C9A04F"/>
                 </a:solidFill>
-                <a:latin typeface="Noto Sans CJK KR"/>
+                <a:latin typeface="Cormorant Garamond"/>
                 <a:ea typeface="Noto Sans CJK KR"/>
               </a:rPr>
               <a:t>Only One</a:t>
@@ -3575,7 +3575,7 @@
             <a:r>
               <a:rPr sz="2400" b="1">
                 <a:solidFill>
-                  <a:srgbClr val="1A2B4A"/>
+                  <a:srgbClr val="0A3D2A"/>
                 </a:solidFill>
                 <a:latin typeface="Noto Sans CJK KR"/>
                 <a:ea typeface="Noto Sans CJK KR"/>
@@ -3640,7 +3640,7 @@
             <a:avLst/>
           </a:prstGeom>
           <a:solidFill>
-            <a:srgbClr val="1A2B4A"/>
+            <a:srgbClr val="0A3D2A"/>
           </a:solidFill>
           <a:ln>
             <a:noFill/>
@@ -3774,7 +3774,7 @@
             <a:avLst/>
           </a:prstGeom>
           <a:solidFill>
-            <a:srgbClr val="1A2B4A"/>
+            <a:srgbClr val="0A3D2A"/>
           </a:solidFill>
           <a:ln>
             <a:noFill/>
@@ -3873,7 +3873,7 @@
             <a:r>
               <a:rPr sz="1100" b="1">
                 <a:solidFill>
-                  <a:srgbClr val="1A2B4A"/>
+                  <a:srgbClr val="0A3D2A"/>
                 </a:solidFill>
                 <a:latin typeface="Noto Sans CJK KR"/>
                 <a:ea typeface="Noto Sans CJK KR"/>
@@ -3958,7 +3958,7 @@
             <a:r>
               <a:rPr sz="1100" b="1">
                 <a:solidFill>
-                  <a:srgbClr val="1A2B4A"/>
+                  <a:srgbClr val="0A3D2A"/>
                 </a:solidFill>
                 <a:latin typeface="Noto Sans CJK KR"/>
                 <a:ea typeface="Noto Sans CJK KR"/>
@@ -4097,7 +4097,7 @@
             <a:avLst/>
           </a:prstGeom>
           <a:solidFill>
-            <a:srgbClr val="1A2B4A"/>
+            <a:srgbClr val="0A3D2A"/>
           </a:solidFill>
           <a:ln>
             <a:noFill/>
@@ -4196,7 +4196,7 @@
             <a:r>
               <a:rPr sz="1100" b="1">
                 <a:solidFill>
-                  <a:srgbClr val="1A2B4A"/>
+                  <a:srgbClr val="0A3D2A"/>
                 </a:solidFill>
                 <a:latin typeface="Noto Sans CJK KR"/>
                 <a:ea typeface="Noto Sans CJK KR"/>
@@ -4252,7 +4252,7 @@
                 <a:latin typeface="Noto Sans CJK KR"/>
                 <a:ea typeface="Noto Sans CJK KR"/>
               </a:rPr>
-              <a:t>· Hyatt 스타일 — 연간 → 분기 → 90일 분할</a:t>
+              <a:t>· 연간 → 분기 → 90일 분할 (QPR 방식)</a:t>
             </a:r>
           </a:p>
           <a:p>
@@ -4281,7 +4281,7 @@
             <a:r>
               <a:rPr sz="1100" b="1">
                 <a:solidFill>
-                  <a:srgbClr val="1A2B4A"/>
+                  <a:srgbClr val="0A3D2A"/>
                 </a:solidFill>
                 <a:latin typeface="Noto Sans CJK KR"/>
                 <a:ea typeface="Noto Sans CJK KR"/>
@@ -4495,7 +4495,7 @@
                 <a:latin typeface="Noto Sans CJK KR"/>
                 <a:ea typeface="Noto Sans CJK KR"/>
               </a:rPr>
-              <a:t>v1.4 · 500부 견적 요청    |    10 / 16</a:t>
+              <a:t>v1.4.2 · 500부 견적 요청    |    10 / 16</a:t>
             </a:r>
           </a:p>
         </p:txBody>
@@ -4632,7 +4632,7 @@
             <a:r>
               <a:rPr sz="2400" b="1">
                 <a:solidFill>
-                  <a:srgbClr val="1A2B4A"/>
+                  <a:srgbClr val="0A3D2A"/>
                 </a:solidFill>
                 <a:latin typeface="Noto Sans CJK KR"/>
                 <a:ea typeface="Noto Sans CJK KR"/>
@@ -4697,7 +4697,7 @@
             <a:avLst/>
           </a:prstGeom>
           <a:solidFill>
-            <a:srgbClr val="1A2B4A"/>
+            <a:srgbClr val="0A3D2A"/>
           </a:solidFill>
           <a:ln>
             <a:noFill/>
@@ -4805,7 +4805,7 @@
                 <a:latin typeface="Noto Sans CJK KR"/>
                 <a:ea typeface="Noto Sans CJK KR"/>
               </a:rPr>
-              <a:t>몰스킨 위클리 + 프랭클린 우선순위 하이브리드 — 좌측 계획 / 우측 메모 (자체 IP 5대 차별화 적용)</a:t>
+              <a:t>자체 5대 IP: 주간 사명 + ABC 우선순위 + 실행 의도 + 도트 메모 + 3줄 회고 — 좌측 계획 / 우측 메모</a:t>
             </a:r>
           </a:p>
         </p:txBody>
@@ -4926,7 +4926,7 @@
             <a:r>
               <a:rPr sz="1400" b="1">
                 <a:solidFill>
-                  <a:srgbClr val="1A2B4A"/>
+                  <a:srgbClr val="0A3D2A"/>
                 </a:solidFill>
                 <a:latin typeface="Noto Sans CJK KR"/>
                 <a:ea typeface="Noto Sans CJK KR"/>
@@ -4991,7 +4991,7 @@
             <a:avLst/>
           </a:prstGeom>
           <a:solidFill>
-            <a:srgbClr val="1A2B4A"/>
+            <a:srgbClr val="0A3D2A"/>
           </a:solidFill>
           <a:ln>
             <a:noFill/>
@@ -5055,7 +5055,7 @@
                 <a:latin typeface="Noto Sans CJK KR"/>
                 <a:ea typeface="Noto Sans CJK KR"/>
               </a:rPr>
-              <a:t>② A · B · C 우선순위 (프랭클린 참고)</a:t>
+              <a:t>② A · B · C 우선순위 (Must·Should·Could)</a:t>
             </a:r>
           </a:p>
         </p:txBody>
@@ -5075,7 +5075,7 @@
             <a:avLst/>
           </a:prstGeom>
           <a:solidFill>
-            <a:srgbClr val="1A2B4A"/>
+            <a:srgbClr val="0A3D2A"/>
           </a:solidFill>
           <a:ln>
             <a:noFill/>
@@ -5203,7 +5203,7 @@
             <a:avLst/>
           </a:prstGeom>
           <a:solidFill>
-            <a:srgbClr val="1A2B4A"/>
+            <a:srgbClr val="0A3D2A"/>
           </a:solidFill>
           <a:ln>
             <a:noFill/>
@@ -5331,7 +5331,7 @@
             <a:avLst/>
           </a:prstGeom>
           <a:solidFill>
-            <a:srgbClr val="1A2B4A"/>
+            <a:srgbClr val="0A3D2A"/>
           </a:solidFill>
           <a:ln>
             <a:noFill/>
@@ -5479,7 +5479,7 @@
                 <a:latin typeface="Noto Sans CJK KR"/>
                 <a:ea typeface="Noto Sans CJK KR"/>
               </a:rPr>
-              <a:t>③ If-Then 3개 (Gollwitzer 실행 의도)</a:t>
+              <a:t>③ If-Then 3개 (실행 의도 부착)</a:t>
             </a:r>
           </a:p>
         </p:txBody>
@@ -5812,7 +5812,7 @@
             <a:r>
               <a:rPr sz="1400" b="1">
                 <a:solidFill>
-                  <a:srgbClr val="1A2B4A"/>
+                  <a:srgbClr val="0A3D2A"/>
                 </a:solidFill>
                 <a:latin typeface="Noto Sans CJK KR"/>
                 <a:ea typeface="Noto Sans CJK KR"/>
@@ -12314,7 +12314,7 @@
             <a:r>
               <a:rPr sz="850" b="1">
                 <a:solidFill>
-                  <a:srgbClr val="1A2B4A"/>
+                  <a:srgbClr val="0A3D2A"/>
                 </a:solidFill>
                 <a:latin typeface="Noto Sans CJK KR"/>
                 <a:ea typeface="Noto Sans CJK KR"/>
@@ -12398,7 +12398,7 @@
             <a:r>
               <a:rPr sz="850" b="1">
                 <a:solidFill>
-                  <a:srgbClr val="1A2B4A"/>
+                  <a:srgbClr val="0A3D2A"/>
                 </a:solidFill>
                 <a:latin typeface="Noto Sans CJK KR"/>
                 <a:ea typeface="Noto Sans CJK KR"/>
@@ -12482,7 +12482,7 @@
             <a:r>
               <a:rPr sz="850" b="1">
                 <a:solidFill>
-                  <a:srgbClr val="1A2B4A"/>
+                  <a:srgbClr val="0A3D2A"/>
                 </a:solidFill>
                 <a:latin typeface="Noto Sans CJK KR"/>
                 <a:ea typeface="Noto Sans CJK KR"/>
@@ -12571,7 +12571,7 @@
                 <a:latin typeface="Noto Sans CJK KR"/>
                 <a:ea typeface="Noto Sans CJK KR"/>
               </a:rPr>
-              <a:t>자체 IP 차별화: ① 주간 사명 · ② 프랭클린 우선순위 · ③ Gollwitzer If-Then · ④ 몰스킨 서셋 · ⑤ 자체 3줄 회고</a:t>
+              <a:t>자체 IP 차별화: ① 주간 사명 · ② ABC 우선순위 · ③ If-Then 실행 의도 · ④ 7mm 도트 그리드 · ⑤ 3줄 회고</a:t>
             </a:r>
           </a:p>
         </p:txBody>
@@ -12695,7 +12695,7 @@
                 <a:latin typeface="Noto Sans CJK KR"/>
                 <a:ea typeface="Noto Sans CJK KR"/>
               </a:rPr>
-              <a:t>v1.4 · 500부 견적 요청    |    11 / 16</a:t>
+              <a:t>v1.4.2 · 500부 견적 요청    |    11 / 16</a:t>
             </a:r>
           </a:p>
         </p:txBody>
@@ -12832,7 +12832,7 @@
             <a:r>
               <a:rPr sz="2400" b="1">
                 <a:solidFill>
-                  <a:srgbClr val="1A2B4A"/>
+                  <a:srgbClr val="0A3D2A"/>
                 </a:solidFill>
                 <a:latin typeface="Noto Sans CJK KR"/>
                 <a:ea typeface="Noto Sans CJK KR"/>
@@ -12897,7 +12897,7 @@
             <a:avLst/>
           </a:prstGeom>
           <a:solidFill>
-            <a:srgbClr val="1A2B4A"/>
+            <a:srgbClr val="0A3D2A"/>
           </a:solidFill>
           <a:ln>
             <a:noFill/>
@@ -13031,7 +13031,7 @@
             <a:avLst/>
           </a:prstGeom>
           <a:solidFill>
-            <a:srgbClr val="1A2B4A"/>
+            <a:srgbClr val="0A3D2A"/>
           </a:solidFill>
           <a:ln>
             <a:noFill/>
@@ -13130,7 +13130,7 @@
             <a:r>
               <a:rPr sz="1100" b="1">
                 <a:solidFill>
-                  <a:srgbClr val="1A2B4A"/>
+                  <a:srgbClr val="0A3D2A"/>
                 </a:solidFill>
                 <a:latin typeface="Noto Sans CJK KR"/>
                 <a:ea typeface="Noto Sans CJK KR"/>
@@ -13169,7 +13169,7 @@
                 <a:latin typeface="Noto Sans CJK KR"/>
                 <a:ea typeface="Noto Sans CJK KR"/>
               </a:rPr>
-              <a:t>· Pennebaker 표현적 글쓰기 4문항 빈칸</a:t>
+              <a:t>· 표현적 글쓰기 4문항 빈칸 (자기 이해 회고 기법)</a:t>
             </a:r>
           </a:p>
           <a:p>
@@ -13215,12 +13215,12 @@
             <a:r>
               <a:rPr sz="1100" b="1">
                 <a:solidFill>
-                  <a:srgbClr val="1A2B4A"/>
-                </a:solidFill>
-                <a:latin typeface="Noto Sans CJK KR"/>
-                <a:ea typeface="Noto Sans CJK KR"/>
-              </a:rPr>
-              <a:t>Pennebaker 4문항(고정 라벨)</a:t>
+                  <a:srgbClr val="0A3D2A"/>
+                </a:solidFill>
+                <a:latin typeface="Noto Sans CJK KR"/>
+                <a:ea typeface="Noto Sans CJK KR"/>
+              </a:rPr>
+              <a:t>표현적 글쓰기 4문항 (고정 라벨)</a:t>
             </a:r>
           </a:p>
           <a:p>
@@ -13322,7 +13322,7 @@
                 <a:latin typeface="Noto Sans CJK KR"/>
                 <a:ea typeface="Noto Sans CJK KR"/>
               </a:rPr>
-              <a:t>근거: Pennebaker(1986) — Expressive Writing</a:t>
+              <a:t>근거: 표현적 글쓰기 — 사실→감정→의미→의도</a:t>
             </a:r>
           </a:p>
         </p:txBody>
@@ -13388,7 +13388,7 @@
             <a:avLst/>
           </a:prstGeom>
           <a:solidFill>
-            <a:srgbClr val="1A2B4A"/>
+            <a:srgbClr val="0A3D2A"/>
           </a:solidFill>
           <a:ln>
             <a:noFill/>
@@ -13487,7 +13487,7 @@
             <a:r>
               <a:rPr sz="1100" b="1">
                 <a:solidFill>
-                  <a:srgbClr val="1A2B4A"/>
+                  <a:srgbClr val="0A3D2A"/>
                 </a:solidFill>
                 <a:latin typeface="Noto Sans CJK KR"/>
                 <a:ea typeface="Noto Sans CJK KR"/>
@@ -13572,7 +13572,7 @@
             <a:r>
               <a:rPr sz="1100" b="1">
                 <a:solidFill>
-                  <a:srgbClr val="1A2B4A"/>
+                  <a:srgbClr val="0A3D2A"/>
                 </a:solidFill>
                 <a:latin typeface="Noto Sans CJK KR"/>
                 <a:ea typeface="Noto Sans CJK KR"/>
@@ -13786,7 +13786,7 @@
                 <a:latin typeface="Noto Sans CJK KR"/>
                 <a:ea typeface="Noto Sans CJK KR"/>
               </a:rPr>
-              <a:t>v1.4 · 500부 견적 요청    |    12 / 16</a:t>
+              <a:t>v1.4.2 · 500부 견적 요청    |    12 / 16</a:t>
             </a:r>
           </a:p>
         </p:txBody>
@@ -13923,7 +13923,7 @@
             <a:r>
               <a:rPr sz="2400" b="1">
                 <a:solidFill>
-                  <a:srgbClr val="1A2B4A"/>
+                  <a:srgbClr val="0A3D2A"/>
                 </a:solidFill>
                 <a:latin typeface="Noto Sans CJK KR"/>
                 <a:ea typeface="Noto Sans CJK KR"/>
@@ -13988,7 +13988,7 @@
             <a:avLst/>
           </a:prstGeom>
           <a:solidFill>
-            <a:srgbClr val="1A2B4A"/>
+            <a:srgbClr val="0A3D2A"/>
           </a:solidFill>
           <a:ln>
             <a:noFill/>
@@ -14122,7 +14122,7 @@
             <a:avLst/>
           </a:prstGeom>
           <a:solidFill>
-            <a:srgbClr val="1A2B4A"/>
+            <a:srgbClr val="0A3D2A"/>
           </a:solidFill>
           <a:ln>
             <a:noFill/>
@@ -14221,7 +14221,7 @@
             <a:r>
               <a:rPr sz="1050" b="1">
                 <a:solidFill>
-                  <a:srgbClr val="1A2B4A"/>
+                  <a:srgbClr val="0A3D2A"/>
                 </a:solidFill>
                 <a:latin typeface="Noto Sans CJK KR"/>
                 <a:ea typeface="Noto Sans CJK KR"/>
@@ -14246,7 +14246,7 @@
             <a:avLst/>
           </a:prstGeom>
           <a:solidFill>
-            <a:srgbClr val="1A2B4A"/>
+            <a:srgbClr val="0A3D2A"/>
           </a:solidFill>
           <a:ln>
             <a:noFill/>
@@ -14330,7 +14330,7 @@
             <a:avLst/>
           </a:prstGeom>
           <a:solidFill>
-            <a:srgbClr val="1A2B4A"/>
+            <a:srgbClr val="0A3D2A"/>
           </a:solidFill>
           <a:ln>
             <a:noFill/>
@@ -14414,7 +14414,7 @@
             <a:avLst/>
           </a:prstGeom>
           <a:solidFill>
-            <a:srgbClr val="1A2B4A"/>
+            <a:srgbClr val="0A3D2A"/>
           </a:solidFill>
           <a:ln>
             <a:noFill/>
@@ -14498,7 +14498,7 @@
             <a:avLst/>
           </a:prstGeom>
           <a:solidFill>
-            <a:srgbClr val="1A2B4A"/>
+            <a:srgbClr val="0A3D2A"/>
           </a:solidFill>
           <a:ln>
             <a:noFill/>
@@ -15706,7 +15706,7 @@
                 <a:latin typeface="Noto Sans CJK KR"/>
                 <a:ea typeface="Noto Sans CJK KR"/>
               </a:rPr>
-              <a:t>근거: Matthews(2007) Group 5 — 글로 쓴 목표 + 친구에게 약속·진척 보고 시 달성률 +78%</a:t>
+              <a:t>근거: 사회적 약속 연구 — 글로 쓴 목표 + 타인에게 진척 보고 시 달성률 +78%</a:t>
             </a:r>
           </a:p>
         </p:txBody>
@@ -15772,7 +15772,7 @@
             <a:avLst/>
           </a:prstGeom>
           <a:solidFill>
-            <a:srgbClr val="1A2B4A"/>
+            <a:srgbClr val="0A3D2A"/>
           </a:solidFill>
           <a:ln>
             <a:noFill/>
@@ -15871,7 +15871,7 @@
             <a:r>
               <a:rPr sz="1100" b="1">
                 <a:solidFill>
-                  <a:srgbClr val="1A2B4A"/>
+                  <a:srgbClr val="0A3D2A"/>
                 </a:solidFill>
                 <a:latin typeface="Noto Sans CJK KR"/>
                 <a:ea typeface="Noto Sans CJK KR"/>
@@ -15973,7 +15973,7 @@
             <a:r>
               <a:rPr sz="1100" b="1">
                 <a:solidFill>
-                  <a:srgbClr val="1A2B4A"/>
+                  <a:srgbClr val="0A3D2A"/>
                 </a:solidFill>
                 <a:latin typeface="Noto Sans CJK KR"/>
                 <a:ea typeface="Noto Sans CJK KR"/>
@@ -16170,7 +16170,7 @@
                 <a:latin typeface="Noto Sans CJK KR"/>
                 <a:ea typeface="Noto Sans CJK KR"/>
               </a:rPr>
-              <a:t>v1.4 · 500부 견적 요청    |    13 / 16</a:t>
+              <a:t>v1.4.2 · 500부 견적 요청    |    13 / 16</a:t>
             </a:r>
           </a:p>
         </p:txBody>
@@ -16307,7 +16307,7 @@
             <a:r>
               <a:rPr sz="2400" b="1">
                 <a:solidFill>
-                  <a:srgbClr val="1A2B4A"/>
+                  <a:srgbClr val="0A3D2A"/>
                 </a:solidFill>
                 <a:latin typeface="Noto Sans CJK KR"/>
                 <a:ea typeface="Noto Sans CJK KR"/>
@@ -16372,7 +16372,7 @@
             <a:avLst/>
           </a:prstGeom>
           <a:solidFill>
-            <a:srgbClr val="1A2B4A"/>
+            <a:srgbClr val="0A3D2A"/>
           </a:solidFill>
           <a:ln>
             <a:noFill/>
@@ -16544,7 +16544,7 @@
             <a:avLst/>
           </a:prstGeom>
           <a:solidFill>
-            <a:srgbClr val="1A2B4A"/>
+            <a:srgbClr val="0A3D2A"/>
           </a:solidFill>
           <a:ln>
             <a:noFill/>
@@ -16603,7 +16603,7 @@
             <a:r>
               <a:rPr sz="1000" b="1">
                 <a:solidFill>
-                  <a:srgbClr val="1A2B4A"/>
+                  <a:srgbClr val="0A3D2A"/>
                 </a:solidFill>
                 <a:latin typeface="Noto Sans CJK KR"/>
                 <a:ea typeface="Noto Sans CJK KR"/>
@@ -16643,7 +16643,7 @@
             <a:r>
               <a:rPr sz="1600" b="1">
                 <a:solidFill>
-                  <a:srgbClr val="1A2B4A"/>
+                  <a:srgbClr val="0A3D2A"/>
                 </a:solidFill>
                 <a:latin typeface="Noto Sans CJK KR"/>
                 <a:ea typeface="Noto Sans CJK KR"/>
@@ -16717,7 +16717,7 @@
             <a:r>
               <a:rPr sz="1050" b="1">
                 <a:solidFill>
-                  <a:srgbClr val="1A2B4A"/>
+                  <a:srgbClr val="0A3D2A"/>
                 </a:solidFill>
                 <a:latin typeface="Noto Sans CJK KR"/>
                 <a:ea typeface="Noto Sans CJK KR"/>
@@ -16845,7 +16845,7 @@
             <a:r>
               <a:rPr sz="1400" b="1">
                 <a:solidFill>
-                  <a:srgbClr val="1A2B4A"/>
+                  <a:srgbClr val="0A3D2A"/>
                 </a:solidFill>
                 <a:latin typeface="Noto Sans CJK KR"/>
                 <a:ea typeface="Noto Sans CJK KR"/>
@@ -16919,12 +16919,12 @@
             <a:r>
               <a:rPr sz="1000" b="1">
                 <a:solidFill>
-                  <a:srgbClr val="1A2B4A"/>
-                </a:solidFill>
-                <a:latin typeface="Noto Sans CJK KR"/>
-                <a:ea typeface="Noto Sans CJK KR"/>
-              </a:rPr>
-              <a:t>· 근거: Mueller &amp; Oppenheimer(2014) — 손글씨 → 개념 이해·장기 기억 우위 / Smoker(2009) — 손글씨 루틴 → 자기 관련 정보 처리 강화</a:t>
+                  <a:srgbClr val="0A3D2A"/>
+                </a:solidFill>
+                <a:latin typeface="Noto Sans CJK KR"/>
+                <a:ea typeface="Noto Sans CJK KR"/>
+              </a:rPr>
+              <a:t>· 근거: 인지심리학 연구 — 손글씨가 키보드 입력보다 개념 이해·장기 기억 + 자기 관련 정보 처리에 유리</a:t>
             </a:r>
           </a:p>
         </p:txBody>
@@ -17048,7 +17048,7 @@
                 <a:latin typeface="Noto Sans CJK KR"/>
                 <a:ea typeface="Noto Sans CJK KR"/>
               </a:rPr>
-              <a:t>v1.4 · 500부 견적 요청    |    14 / 16</a:t>
+              <a:t>v1.4.2 · 500부 견적 요청    |    14 / 16</a:t>
             </a:r>
           </a:p>
         </p:txBody>
@@ -17185,7 +17185,7 @@
             <a:r>
               <a:rPr sz="2400" b="1">
                 <a:solidFill>
-                  <a:srgbClr val="1A2B4A"/>
+                  <a:srgbClr val="0A3D2A"/>
                 </a:solidFill>
                 <a:latin typeface="Noto Sans CJK KR"/>
                 <a:ea typeface="Noto Sans CJK KR"/>
@@ -17250,7 +17250,7 @@
             <a:avLst/>
           </a:prstGeom>
           <a:solidFill>
-            <a:srgbClr val="1A2B4A"/>
+            <a:srgbClr val="0A3D2A"/>
           </a:solidFill>
           <a:ln>
             <a:noFill/>
@@ -17483,7 +17483,7 @@
             <a:r>
               <a:rPr sz="1800" b="1">
                 <a:solidFill>
-                  <a:srgbClr val="1A2B4A"/>
+                  <a:srgbClr val="0A3D2A"/>
                 </a:solidFill>
                 <a:latin typeface="Noto Sans CJK KR"/>
                 <a:ea typeface="Noto Sans CJK KR"/>
@@ -17693,7 +17693,7 @@
             <a:r>
               <a:rPr sz="1800" b="1">
                 <a:solidFill>
-                  <a:srgbClr val="1A2B4A"/>
+                  <a:srgbClr val="0A3D2A"/>
                 </a:solidFill>
                 <a:latin typeface="Noto Sans CJK KR"/>
                 <a:ea typeface="Noto Sans CJK KR"/>
@@ -17903,7 +17903,7 @@
             <a:r>
               <a:rPr sz="1800" b="1">
                 <a:solidFill>
-                  <a:srgbClr val="1A2B4A"/>
+                  <a:srgbClr val="0A3D2A"/>
                 </a:solidFill>
                 <a:latin typeface="Noto Sans CJK KR"/>
                 <a:ea typeface="Noto Sans CJK KR"/>
@@ -18113,7 +18113,7 @@
             <a:r>
               <a:rPr sz="1800" b="1">
                 <a:solidFill>
-                  <a:srgbClr val="1A2B4A"/>
+                  <a:srgbClr val="0A3D2A"/>
                 </a:solidFill>
                 <a:latin typeface="Noto Sans CJK KR"/>
                 <a:ea typeface="Noto Sans CJK KR"/>
@@ -18282,7 +18282,7 @@
                 <a:latin typeface="Noto Sans CJK KR"/>
                 <a:ea typeface="Noto Sans CJK KR"/>
               </a:rPr>
-              <a:t>v1.4 · 500부 견적 요청    |    15 / 16</a:t>
+              <a:t>v1.4.2 · 500부 견적 요청    |    15 / 16</a:t>
             </a:r>
           </a:p>
         </p:txBody>
@@ -18419,7 +18419,7 @@
             <a:r>
               <a:rPr sz="2400" b="1">
                 <a:solidFill>
-                  <a:srgbClr val="1A2B4A"/>
+                  <a:srgbClr val="0A3D2A"/>
                 </a:solidFill>
                 <a:latin typeface="Noto Sans CJK KR"/>
                 <a:ea typeface="Noto Sans CJK KR"/>
@@ -18484,7 +18484,7 @@
             <a:avLst/>
           </a:prstGeom>
           <a:solidFill>
-            <a:srgbClr val="1A2B4A"/>
+            <a:srgbClr val="0A3D2A"/>
           </a:solidFill>
           <a:ln>
             <a:noFill/>
@@ -18587,7 +18587,7 @@
             <a:r>
               <a:rPr sz="1200" b="1">
                 <a:solidFill>
-                  <a:srgbClr val="1A2B4A"/>
+                  <a:srgbClr val="0A3D2A"/>
                 </a:solidFill>
                 <a:latin typeface="Noto Sans CJK KR"/>
                 <a:ea typeface="Noto Sans CJK KR"/>
@@ -18656,7 +18656,7 @@
             <a:avLst/>
           </a:prstGeom>
           <a:solidFill>
-            <a:srgbClr val="1A2B4A"/>
+            <a:srgbClr val="0A3D2A"/>
           </a:solidFill>
           <a:ln>
             <a:noFill/>
@@ -18780,7 +18780,7 @@
             <a:avLst/>
           </a:prstGeom>
           <a:solidFill>
-            <a:srgbClr val="1A2B4A"/>
+            <a:srgbClr val="0A3D2A"/>
           </a:solidFill>
           <a:ln>
             <a:noFill/>
@@ -18904,7 +18904,7 @@
             <a:avLst/>
           </a:prstGeom>
           <a:solidFill>
-            <a:srgbClr val="1A2B4A"/>
+            <a:srgbClr val="0A3D2A"/>
           </a:solidFill>
           <a:ln>
             <a:noFill/>
@@ -19028,7 +19028,7 @@
             <a:avLst/>
           </a:prstGeom>
           <a:solidFill>
-            <a:srgbClr val="1A2B4A"/>
+            <a:srgbClr val="0A3D2A"/>
           </a:solidFill>
           <a:ln>
             <a:noFill/>
@@ -19152,7 +19152,7 @@
             <a:avLst/>
           </a:prstGeom>
           <a:solidFill>
-            <a:srgbClr val="1A2B4A"/>
+            <a:srgbClr val="0A3D2A"/>
           </a:solidFill>
           <a:ln>
             <a:noFill/>
@@ -19276,7 +19276,7 @@
             <a:avLst/>
           </a:prstGeom>
           <a:solidFill>
-            <a:srgbClr val="1A2B4A"/>
+            <a:srgbClr val="0A3D2A"/>
           </a:solidFill>
           <a:ln>
             <a:noFill/>
@@ -19400,7 +19400,7 @@
             <a:avLst/>
           </a:prstGeom>
           <a:solidFill>
-            <a:srgbClr val="1A2B4A"/>
+            <a:srgbClr val="0A3D2A"/>
           </a:solidFill>
           <a:ln>
             <a:noFill/>
@@ -19539,7 +19539,7 @@
             <a:r>
               <a:rPr sz="1200" b="1">
                 <a:solidFill>
-                  <a:srgbClr val="1A2B4A"/>
+                  <a:srgbClr val="0A3D2A"/>
                 </a:solidFill>
                 <a:latin typeface="Noto Sans CJK KR"/>
                 <a:ea typeface="Noto Sans CJK KR"/>
@@ -19608,7 +19608,7 @@
             <a:avLst/>
           </a:prstGeom>
           <a:solidFill>
-            <a:srgbClr val="1A2B4A"/>
+            <a:srgbClr val="0A3D2A"/>
           </a:solidFill>
           <a:ln w="5080">
             <a:solidFill>
@@ -19694,7 +19694,7 @@
             <a:avLst/>
           </a:prstGeom>
           <a:solidFill>
-            <a:srgbClr val="1A2B4A"/>
+            <a:srgbClr val="0A3D2A"/>
           </a:solidFill>
           <a:ln w="5080">
             <a:solidFill>
@@ -19780,7 +19780,7 @@
             <a:avLst/>
           </a:prstGeom>
           <a:solidFill>
-            <a:srgbClr val="1A2B4A"/>
+            <a:srgbClr val="0A3D2A"/>
           </a:solidFill>
           <a:ln w="5080">
             <a:solidFill>
@@ -21001,7 +21001,7 @@
             <a:r>
               <a:rPr sz="1100" b="1">
                 <a:solidFill>
-                  <a:srgbClr val="1A2B4A"/>
+                  <a:srgbClr val="0A3D2A"/>
                 </a:solidFill>
                 <a:latin typeface="Noto Sans CJK KR"/>
                 <a:ea typeface="Noto Sans CJK KR"/>
@@ -21069,7 +21069,7 @@
             <a:r>
               <a:rPr sz="1050" b="1">
                 <a:solidFill>
-                  <a:srgbClr val="1A2B4A"/>
+                  <a:srgbClr val="0A3D2A"/>
                 </a:solidFill>
                 <a:latin typeface="Noto Sans CJK KR"/>
                 <a:ea typeface="Noto Sans CJK KR"/>
@@ -21198,7 +21198,7 @@
                 <a:latin typeface="Noto Sans CJK KR"/>
                 <a:ea typeface="Noto Sans CJK KR"/>
               </a:rPr>
-              <a:t>v1.4 · 500부 견적 요청    |    16 / 16</a:t>
+              <a:t>v1.4.2 · 500부 견적 요청    |    16 / 16</a:t>
             </a:r>
           </a:p>
         </p:txBody>
@@ -21335,7 +21335,7 @@
             <a:r>
               <a:rPr sz="2400" b="1">
                 <a:solidFill>
-                  <a:srgbClr val="1A2B4A"/>
+                  <a:srgbClr val="0A3D2A"/>
                 </a:solidFill>
                 <a:latin typeface="Noto Sans CJK KR"/>
                 <a:ea typeface="Noto Sans CJK KR"/>
@@ -21400,7 +21400,7 @@
             <a:avLst/>
           </a:prstGeom>
           <a:solidFill>
-            <a:srgbClr val="1A2B4A"/>
+            <a:srgbClr val="0A3D2A"/>
           </a:solidFill>
           <a:ln>
             <a:noFill/>
@@ -21543,7 +21543,7 @@
             <a:r>
               <a:rPr sz="1800" b="1">
                 <a:solidFill>
-                  <a:srgbClr val="1A2B4A"/>
+                  <a:srgbClr val="0A3D2A"/>
                 </a:solidFill>
                 <a:latin typeface="Noto Sans CJK KR"/>
                 <a:ea typeface="Noto Sans CJK KR"/>
@@ -21747,7 +21747,7 @@
             <a:r>
               <a:rPr sz="1800" b="1">
                 <a:solidFill>
-                  <a:srgbClr val="1A2B4A"/>
+                  <a:srgbClr val="0A3D2A"/>
                 </a:solidFill>
                 <a:latin typeface="Noto Sans CJK KR"/>
                 <a:ea typeface="Noto Sans CJK KR"/>
@@ -21951,7 +21951,7 @@
             <a:r>
               <a:rPr sz="1800" b="1">
                 <a:solidFill>
-                  <a:srgbClr val="1A2B4A"/>
+                  <a:srgbClr val="0A3D2A"/>
                 </a:solidFill>
                 <a:latin typeface="Noto Sans CJK KR"/>
                 <a:ea typeface="Noto Sans CJK KR"/>
@@ -22155,7 +22155,7 @@
             <a:r>
               <a:rPr sz="1800" b="1">
                 <a:solidFill>
-                  <a:srgbClr val="1A2B4A"/>
+                  <a:srgbClr val="0A3D2A"/>
                 </a:solidFill>
                 <a:latin typeface="Noto Sans CJK KR"/>
                 <a:ea typeface="Noto Sans CJK KR"/>
@@ -22359,7 +22359,7 @@
             <a:r>
               <a:rPr sz="1800" b="1">
                 <a:solidFill>
-                  <a:srgbClr val="1A2B4A"/>
+                  <a:srgbClr val="0A3D2A"/>
                 </a:solidFill>
                 <a:latin typeface="Noto Sans CJK KR"/>
                 <a:ea typeface="Noto Sans CJK KR"/>
@@ -22568,7 +22568,7 @@
                 <a:latin typeface="Noto Sans CJK KR"/>
                 <a:ea typeface="Noto Sans CJK KR"/>
               </a:rPr>
-              <a:t>v1.4 · 500부 견적 요청    |    2 / 16</a:t>
+              <a:t>v1.4.2 · 500부 견적 요청    |    2 / 16</a:t>
             </a:r>
           </a:p>
         </p:txBody>
@@ -22705,7 +22705,7 @@
             <a:r>
               <a:rPr sz="2400" b="1">
                 <a:solidFill>
-                  <a:srgbClr val="1A2B4A"/>
+                  <a:srgbClr val="0A3D2A"/>
                 </a:solidFill>
                 <a:latin typeface="Noto Sans CJK KR"/>
                 <a:ea typeface="Noto Sans CJK KR"/>
@@ -22770,7 +22770,7 @@
             <a:avLst/>
           </a:prstGeom>
           <a:solidFill>
-            <a:srgbClr val="1A2B4A"/>
+            <a:srgbClr val="0A3D2A"/>
           </a:solidFill>
           <a:ln>
             <a:noFill/>
@@ -22913,7 +22913,7 @@
             <a:r>
               <a:rPr sz="3200" b="1">
                 <a:solidFill>
-                  <a:srgbClr val="1A2B4A"/>
+                  <a:srgbClr val="0A3D2A"/>
                 </a:solidFill>
                 <a:latin typeface="Noto Sans CJK KR"/>
                 <a:ea typeface="Noto Sans CJK KR"/>
@@ -23127,7 +23127,7 @@
                 <a:latin typeface="Noto Sans CJK KR"/>
                 <a:ea typeface="Noto Sans CJK KR"/>
               </a:rPr>
-              <a:t>v1.4 · 500부 견적 요청    |    3 / 16</a:t>
+              <a:t>v1.4.2 · 500부 견적 요청    |    3 / 16</a:t>
             </a:r>
           </a:p>
         </p:txBody>
@@ -23264,7 +23264,7 @@
             <a:r>
               <a:rPr sz="2400" b="1">
                 <a:solidFill>
-                  <a:srgbClr val="1A2B4A"/>
+                  <a:srgbClr val="0A3D2A"/>
                 </a:solidFill>
                 <a:latin typeface="Noto Sans CJK KR"/>
                 <a:ea typeface="Noto Sans CJK KR"/>
@@ -23329,7 +23329,7 @@
             <a:avLst/>
           </a:prstGeom>
           <a:solidFill>
-            <a:srgbClr val="1A2B4A"/>
+            <a:srgbClr val="0A3D2A"/>
           </a:solidFill>
           <a:ln>
             <a:noFill/>
@@ -23432,7 +23432,7 @@
             <a:r>
               <a:rPr sz="1400" b="1">
                 <a:solidFill>
-                  <a:srgbClr val="1A2B4A"/>
+                  <a:srgbClr val="0A3D2A"/>
                 </a:solidFill>
                 <a:latin typeface="Noto Sans CJK KR"/>
                 <a:ea typeface="Noto Sans CJK KR"/>
@@ -23521,7 +23521,7 @@
                 <a:latin typeface="Noto Sans CJK KR"/>
                 <a:ea typeface="Noto Sans CJK KR"/>
               </a:rPr>
-              <a:t>· 30 ~ 50대 자기설계 의지자</a:t>
+              <a:t>· 10대 후반 ~ 50대 자기설계 의지자</a:t>
             </a:r>
           </a:p>
           <a:p>
@@ -23538,7 +23538,7 @@
                 <a:latin typeface="Noto Sans CJK KR"/>
                 <a:ea typeface="Noto Sans CJK KR"/>
               </a:rPr>
-              <a:t>· 검사·진단 도구를 일상에 통합하려는 직장인 / 사업자</a:t>
+              <a:t>· 학생·성인·준비생·직장인·프리랜서·사업자 전 직군</a:t>
             </a:r>
           </a:p>
           <a:p>
@@ -23624,7 +23624,7 @@
             <a:r>
               <a:rPr sz="1400" b="1">
                 <a:solidFill>
-                  <a:srgbClr val="1A2B4A"/>
+                  <a:srgbClr val="0A3D2A"/>
                 </a:solidFill>
                 <a:latin typeface="Noto Sans CJK KR"/>
                 <a:ea typeface="Noto Sans CJK KR"/>
@@ -23693,7 +23693,7 @@
             <a:avLst/>
           </a:prstGeom>
           <a:solidFill>
-            <a:srgbClr val="1A2B4A"/>
+            <a:srgbClr val="0A3D2A"/>
           </a:solidFill>
           <a:ln>
             <a:noFill/>
@@ -23792,7 +23792,7 @@
             <a:r>
               <a:rPr sz="1300" b="1">
                 <a:solidFill>
-                  <a:srgbClr val="1A2B4A"/>
+                  <a:srgbClr val="0A3D2A"/>
                 </a:solidFill>
                 <a:latin typeface="Noto Sans CJK KR"/>
                 <a:ea typeface="Noto Sans CJK KR"/>
@@ -23857,7 +23857,7 @@
             <a:avLst/>
           </a:prstGeom>
           <a:solidFill>
-            <a:srgbClr val="1A2B4A"/>
+            <a:srgbClr val="0A3D2A"/>
           </a:solidFill>
           <a:ln>
             <a:noFill/>
@@ -23956,7 +23956,7 @@
             <a:r>
               <a:rPr sz="1300" b="1">
                 <a:solidFill>
-                  <a:srgbClr val="1A2B4A"/>
+                  <a:srgbClr val="0A3D2A"/>
                 </a:solidFill>
                 <a:latin typeface="Noto Sans CJK KR"/>
                 <a:ea typeface="Noto Sans CJK KR"/>
@@ -24021,7 +24021,7 @@
             <a:avLst/>
           </a:prstGeom>
           <a:solidFill>
-            <a:srgbClr val="1A2B4A"/>
+            <a:srgbClr val="0A3D2A"/>
           </a:solidFill>
           <a:ln>
             <a:noFill/>
@@ -24120,7 +24120,7 @@
             <a:r>
               <a:rPr sz="1300" b="1">
                 <a:solidFill>
-                  <a:srgbClr val="1A2B4A"/>
+                  <a:srgbClr val="0A3D2A"/>
                 </a:solidFill>
                 <a:latin typeface="Noto Sans CJK KR"/>
                 <a:ea typeface="Noto Sans CJK KR"/>
@@ -24289,7 +24289,7 @@
                 <a:latin typeface="Noto Sans CJK KR"/>
                 <a:ea typeface="Noto Sans CJK KR"/>
               </a:rPr>
-              <a:t>v1.4 · 500부 견적 요청    |    4 / 16</a:t>
+              <a:t>v1.4.2 · 500부 견적 요청    |    4 / 16</a:t>
             </a:r>
           </a:p>
         </p:txBody>
@@ -24426,7 +24426,7 @@
             <a:r>
               <a:rPr sz="2400" b="1">
                 <a:solidFill>
-                  <a:srgbClr val="1A2B4A"/>
+                  <a:srgbClr val="0A3D2A"/>
                 </a:solidFill>
                 <a:latin typeface="Noto Sans CJK KR"/>
                 <a:ea typeface="Noto Sans CJK KR"/>
@@ -24491,7 +24491,7 @@
             <a:avLst/>
           </a:prstGeom>
           <a:solidFill>
-            <a:srgbClr val="1A2B4A"/>
+            <a:srgbClr val="0A3D2A"/>
           </a:solidFill>
           <a:ln>
             <a:noFill/>
@@ -24724,7 +24724,7 @@
             <a:r>
               <a:rPr sz="1400" b="1">
                 <a:solidFill>
-                  <a:srgbClr val="1A2B4A"/>
+                  <a:srgbClr val="0A3D2A"/>
                 </a:solidFill>
                 <a:latin typeface="Noto Sans CJK KR"/>
                 <a:ea typeface="Noto Sans CJK KR"/>
@@ -24769,7 +24769,7 @@
                 <a:latin typeface="Noto Sans CJK KR"/>
                 <a:ea typeface="Noto Sans CJK KR"/>
               </a:rPr>
-              <a:t>몰스킨 위클리 라지와 동일 폭</a:t>
+              <a:t>시장 표준 A5 위클리 사이즈</a:t>
             </a:r>
           </a:p>
         </p:txBody>
@@ -24934,12 +24934,12 @@
             <a:r>
               <a:rPr sz="1400" b="1">
                 <a:solidFill>
-                  <a:srgbClr val="1A2B4A"/>
-                </a:solidFill>
-                <a:latin typeface="Noto Sans CJK KR"/>
-                <a:ea typeface="Noto Sans CJK KR"/>
-              </a:rPr>
-              <a:t>PU 양장 + 금박 박표지</a:t>
+                  <a:srgbClr val="0A3D2A"/>
+                </a:solidFill>
+                <a:latin typeface="Noto Sans CJK KR"/>
+                <a:ea typeface="Noto Sans CJK KR"/>
+              </a:rPr>
+              <a:t>PU 양장 (BRG) + 금박 박표지</a:t>
             </a:r>
           </a:p>
         </p:txBody>
@@ -24979,7 +24979,7 @@
                 <a:latin typeface="Noto Sans CJK KR"/>
                 <a:ea typeface="Noto Sans CJK KR"/>
               </a:rPr>
-              <a:t>형압 인생포트폴리오 로고</a:t>
+              <a:t>텍스트 박표지만 (형압 없음)</a:t>
             </a:r>
           </a:p>
         </p:txBody>
@@ -25144,7 +25144,7 @@
             <a:r>
               <a:rPr sz="1400" b="1">
                 <a:solidFill>
-                  <a:srgbClr val="1A2B4A"/>
+                  <a:srgbClr val="0A3D2A"/>
                 </a:solidFill>
                 <a:latin typeface="Noto Sans CJK KR"/>
                 <a:ea typeface="Noto Sans CJK KR"/>
@@ -25354,7 +25354,7 @@
             <a:r>
               <a:rPr sz="1400" b="1">
                 <a:solidFill>
-                  <a:srgbClr val="1A2B4A"/>
+                  <a:srgbClr val="0A3D2A"/>
                 </a:solidFill>
                 <a:latin typeface="Noto Sans CJK KR"/>
                 <a:ea typeface="Noto Sans CJK KR"/>
@@ -25564,7 +25564,7 @@
             <a:r>
               <a:rPr sz="1400" b="1">
                 <a:solidFill>
-                  <a:srgbClr val="1A2B4A"/>
+                  <a:srgbClr val="0A3D2A"/>
                 </a:solidFill>
                 <a:latin typeface="Noto Sans CJK KR"/>
                 <a:ea typeface="Noto Sans CJK KR"/>
@@ -25774,7 +25774,7 @@
             <a:r>
               <a:rPr sz="1400" b="1">
                 <a:solidFill>
-                  <a:srgbClr val="1A2B4A"/>
+                  <a:srgbClr val="0A3D2A"/>
                 </a:solidFill>
                 <a:latin typeface="Noto Sans CJK KR"/>
                 <a:ea typeface="Noto Sans CJK KR"/>
@@ -25943,7 +25943,7 @@
                 <a:latin typeface="Noto Sans CJK KR"/>
                 <a:ea typeface="Noto Sans CJK KR"/>
               </a:rPr>
-              <a:t>v1.4 · 500부 견적 요청    |    5 / 16</a:t>
+              <a:t>v1.4.2 · 500부 견적 요청    |    5 / 16</a:t>
             </a:r>
           </a:p>
         </p:txBody>
@@ -26080,7 +26080,7 @@
             <a:r>
               <a:rPr sz="2400" b="1">
                 <a:solidFill>
-                  <a:srgbClr val="1A2B4A"/>
+                  <a:srgbClr val="0A3D2A"/>
                 </a:solidFill>
                 <a:latin typeface="Noto Sans CJK KR"/>
                 <a:ea typeface="Noto Sans CJK KR"/>
@@ -26145,7 +26145,7 @@
             <a:avLst/>
           </a:prstGeom>
           <a:solidFill>
-            <a:srgbClr val="1A2B4A"/>
+            <a:srgbClr val="0A3D2A"/>
           </a:solidFill>
           <a:ln>
             <a:noFill/>
@@ -26233,7 +26233,7 @@
             <a:avLst/>
           </a:prstGeom>
           <a:solidFill>
-            <a:srgbClr val="1A2B4A"/>
+            <a:srgbClr val="0A3D2A"/>
           </a:solidFill>
           <a:ln>
             <a:noFill/>
@@ -26343,7 +26343,7 @@
                 <a:latin typeface="Noto Sans CJK KR"/>
                 <a:ea typeface="Noto Sans CJK KR"/>
               </a:rPr>
-              <a:t>CLASSIC NAVY</a:t>
+              <a:t>BRITISH RACING GREEN</a:t>
             </a:r>
           </a:p>
         </p:txBody>
@@ -26378,12 +26378,12 @@
             <a:r>
               <a:rPr sz="1500" b="1">
                 <a:solidFill>
-                  <a:srgbClr val="1A2B4A"/>
-                </a:solidFill>
-                <a:latin typeface="Noto Sans CJK KR"/>
-                <a:ea typeface="Noto Sans CJK KR"/>
-              </a:rPr>
-              <a:t>클래식 네이비</a:t>
+                  <a:srgbClr val="0A3D2A"/>
+                </a:solidFill>
+                <a:latin typeface="Noto Sans CJK KR"/>
+                <a:ea typeface="Noto Sans CJK KR"/>
+              </a:rPr>
+              <a:t>BRG 그린</a:t>
             </a:r>
           </a:p>
         </p:txBody>
@@ -26423,7 +26423,7 @@
                 <a:latin typeface="Noto Sans CJK KR"/>
                 <a:ea typeface="Noto Sans CJK KR"/>
               </a:rPr>
-              <a:t>기본 컬러</a:t>
+              <a:t>기본 컬러 (v1.4.2 ★)</a:t>
             </a:r>
           </a:p>
         </p:txBody>
@@ -26588,7 +26588,7 @@
             <a:r>
               <a:rPr sz="1500" b="1">
                 <a:solidFill>
-                  <a:srgbClr val="1A2B4A"/>
+                  <a:srgbClr val="0A3D2A"/>
                 </a:solidFill>
                 <a:latin typeface="Noto Sans CJK KR"/>
                 <a:ea typeface="Noto Sans CJK KR"/>
@@ -26653,7 +26653,7 @@
             <a:avLst/>
           </a:prstGeom>
           <a:solidFill>
-            <a:srgbClr val="1F3F32"/>
+            <a:srgbClr val="2C2C2C"/>
           </a:solidFill>
           <a:ln>
             <a:noFill/>
@@ -26763,7 +26763,7 @@
                 <a:latin typeface="Noto Sans CJK KR"/>
                 <a:ea typeface="Noto Sans CJK KR"/>
               </a:rPr>
-              <a:t>FOREST GREEN</a:t>
+              <a:t>DARK GRAY</a:t>
             </a:r>
           </a:p>
         </p:txBody>
@@ -26798,12 +26798,12 @@
             <a:r>
               <a:rPr sz="1500" b="1">
                 <a:solidFill>
-                  <a:srgbClr val="1A2B4A"/>
-                </a:solidFill>
-                <a:latin typeface="Noto Sans CJK KR"/>
-                <a:ea typeface="Noto Sans CJK KR"/>
-              </a:rPr>
-              <a:t>그린</a:t>
+                  <a:srgbClr val="0A3D2A"/>
+                </a:solidFill>
+                <a:latin typeface="Noto Sans CJK KR"/>
+                <a:ea typeface="Noto Sans CJK KR"/>
+              </a:rPr>
+              <a:t>다크 그레이</a:t>
             </a:r>
           </a:p>
         </p:txBody>
@@ -27008,7 +27008,7 @@
             <a:r>
               <a:rPr sz="1500" b="1">
                 <a:solidFill>
-                  <a:srgbClr val="1A2B4A"/>
+                  <a:srgbClr val="0A3D2A"/>
                 </a:solidFill>
                 <a:latin typeface="Noto Sans CJK KR"/>
                 <a:ea typeface="Noto Sans CJK KR"/>
@@ -27198,7 +27198,7 @@
                 <a:latin typeface="Noto Sans CJK KR"/>
                 <a:ea typeface="Noto Sans CJK KR"/>
               </a:rPr>
-              <a:t>· 표지 본체: PU 양장 (제조사 추천 자재 1종 + 대안 1종 제시 요청)</a:t>
+              <a:t>· 표지 본체: PU 양장 (British Racing Green #0A3D2A, Pantone 357 C)</a:t>
             </a:r>
           </a:p>
           <a:p>
@@ -27215,7 +27215,7 @@
                 <a:latin typeface="Noto Sans CJK KR"/>
                 <a:ea typeface="Noto Sans CJK KR"/>
               </a:rPr>
-              <a:t>· 박표지: 골드 박(#C9A04F 톤) + 형압(blind emboss) 인생포트폴리오 로고</a:t>
+              <a:t>· 박표지: 골드 박(#C9A04F 톤) — LIFE PORTFOLIO / 인생포트폴리오 / Only One 텍스트만</a:t>
             </a:r>
           </a:p>
           <a:p>
@@ -27356,7 +27356,7 @@
                 <a:latin typeface="Noto Sans CJK KR"/>
                 <a:ea typeface="Noto Sans CJK KR"/>
               </a:rPr>
-              <a:t>v1.4 · 500부 견적 요청    |    6 / 16</a:t>
+              <a:t>v1.4.2 · 500부 견적 요청    |    6 / 16</a:t>
             </a:r>
           </a:p>
         </p:txBody>
@@ -27493,7 +27493,7 @@
             <a:r>
               <a:rPr sz="2400" b="1">
                 <a:solidFill>
-                  <a:srgbClr val="1A2B4A"/>
+                  <a:srgbClr val="0A3D2A"/>
                 </a:solidFill>
                 <a:latin typeface="Noto Sans CJK KR"/>
                 <a:ea typeface="Noto Sans CJK KR"/>
@@ -27558,7 +27558,7 @@
             <a:avLst/>
           </a:prstGeom>
           <a:solidFill>
-            <a:srgbClr val="1A2B4A"/>
+            <a:srgbClr val="0A3D2A"/>
           </a:solidFill>
           <a:ln>
             <a:noFill/>
@@ -27791,7 +27791,7 @@
             <a:r>
               <a:rPr sz="1600" b="1">
                 <a:solidFill>
-                  <a:srgbClr val="1A2B4A"/>
+                  <a:srgbClr val="0A3D2A"/>
                 </a:solidFill>
                 <a:latin typeface="Noto Sans CJK KR"/>
                 <a:ea typeface="Noto Sans CJK KR"/>
@@ -28029,7 +28029,7 @@
                 <a:latin typeface="Noto Sans CJK KR"/>
                 <a:ea typeface="Noto Sans CJK KR"/>
               </a:rPr>
-              <a:t>· 256p × 70g = 휴대성 + 1년 기록 충분 (몰스킨급)</a:t>
+              <a:t>· 256p × 70g = 휴대성 + 1년 기록 충분 (시판 다이어리 평균 수준)</a:t>
             </a:r>
           </a:p>
           <a:p>
@@ -28041,7 +28041,7 @@
             <a:r>
               <a:rPr sz="1100" b="1">
                 <a:solidFill>
-                  <a:srgbClr val="1A2B4A"/>
+                  <a:srgbClr val="0A3D2A"/>
                 </a:solidFill>
                 <a:latin typeface="Noto Sans CJK KR"/>
                 <a:ea typeface="Noto Sans CJK KR"/>
@@ -28170,7 +28170,7 @@
                 <a:latin typeface="Noto Sans CJK KR"/>
                 <a:ea typeface="Noto Sans CJK KR"/>
               </a:rPr>
-              <a:t>v1.4 · 500부 견적 요청    |    7 / 16</a:t>
+              <a:t>v1.4.2 · 500부 견적 요청    |    7 / 16</a:t>
             </a:r>
           </a:p>
         </p:txBody>
@@ -28307,7 +28307,7 @@
             <a:r>
               <a:rPr sz="2400" b="1">
                 <a:solidFill>
-                  <a:srgbClr val="1A2B4A"/>
+                  <a:srgbClr val="0A3D2A"/>
                 </a:solidFill>
                 <a:latin typeface="Noto Sans CJK KR"/>
                 <a:ea typeface="Noto Sans CJK KR"/>
@@ -28372,7 +28372,7 @@
             <a:avLst/>
           </a:prstGeom>
           <a:solidFill>
-            <a:srgbClr val="1A2B4A"/>
+            <a:srgbClr val="0A3D2A"/>
           </a:solidFill>
           <a:ln>
             <a:noFill/>
@@ -28475,7 +28475,7 @@
             <a:r>
               <a:rPr sz="1200" b="1">
                 <a:solidFill>
-                  <a:srgbClr val="1A2B4A"/>
+                  <a:srgbClr val="0A3D2A"/>
                 </a:solidFill>
                 <a:latin typeface="Noto Sans CJK KR"/>
                 <a:ea typeface="Noto Sans CJK KR"/>
@@ -28613,7 +28613,7 @@
             <a:r>
               <a:rPr sz="1100" b="1">
                 <a:solidFill>
-                  <a:srgbClr val="1A2B4A"/>
+                  <a:srgbClr val="0A3D2A"/>
                 </a:solidFill>
                 <a:latin typeface="Noto Sans CJK KR"/>
                 <a:ea typeface="Noto Sans CJK KR"/>
@@ -28654,7 +28654,7 @@
             <a:r>
               <a:rPr sz="1200" b="1">
                 <a:solidFill>
-                  <a:srgbClr val="1A2B4A"/>
+                  <a:srgbClr val="0A3D2A"/>
                 </a:solidFill>
                 <a:latin typeface="Noto Sans CJK KR"/>
                 <a:ea typeface="Noto Sans CJK KR"/>
@@ -28723,7 +28723,7 @@
             <a:avLst/>
           </a:prstGeom>
           <a:solidFill>
-            <a:srgbClr val="1A2B4A"/>
+            <a:srgbClr val="0A3D2A"/>
           </a:solidFill>
           <a:ln>
             <a:noFill/>
@@ -28948,7 +28948,7 @@
             <a:r>
               <a:rPr sz="950" b="1">
                 <a:solidFill>
-                  <a:srgbClr val="1A2B4A"/>
+                  <a:srgbClr val="0A3D2A"/>
                 </a:solidFill>
                 <a:latin typeface="Noto Sans CJK KR"/>
                 <a:ea typeface="Noto Sans CJK KR"/>
@@ -29114,7 +29114,7 @@
             <a:r>
               <a:rPr sz="950" b="1">
                 <a:solidFill>
-                  <a:srgbClr val="1A2B4A"/>
+                  <a:srgbClr val="0A3D2A"/>
                 </a:solidFill>
                 <a:latin typeface="Noto Sans CJK KR"/>
                 <a:ea typeface="Noto Sans CJK KR"/>
@@ -29280,7 +29280,7 @@
             <a:r>
               <a:rPr sz="950" b="1">
                 <a:solidFill>
-                  <a:srgbClr val="1A2B4A"/>
+                  <a:srgbClr val="0A3D2A"/>
                 </a:solidFill>
                 <a:latin typeface="Noto Sans CJK KR"/>
                 <a:ea typeface="Noto Sans CJK KR"/>
@@ -29446,7 +29446,7 @@
             <a:r>
               <a:rPr sz="950" b="1">
                 <a:solidFill>
-                  <a:srgbClr val="1A2B4A"/>
+                  <a:srgbClr val="0A3D2A"/>
                 </a:solidFill>
                 <a:latin typeface="Noto Sans CJK KR"/>
                 <a:ea typeface="Noto Sans CJK KR"/>
@@ -29612,7 +29612,7 @@
             <a:r>
               <a:rPr sz="950" b="1">
                 <a:solidFill>
-                  <a:srgbClr val="1A2B4A"/>
+                  <a:srgbClr val="0A3D2A"/>
                 </a:solidFill>
                 <a:latin typeface="Noto Sans CJK KR"/>
                 <a:ea typeface="Noto Sans CJK KR"/>
@@ -29778,7 +29778,7 @@
             <a:r>
               <a:rPr sz="950" b="1">
                 <a:solidFill>
-                  <a:srgbClr val="1A2B4A"/>
+                  <a:srgbClr val="0A3D2A"/>
                 </a:solidFill>
                 <a:latin typeface="Noto Sans CJK KR"/>
                 <a:ea typeface="Noto Sans CJK KR"/>
@@ -29944,7 +29944,7 @@
             <a:r>
               <a:rPr sz="950" b="1">
                 <a:solidFill>
-                  <a:srgbClr val="1A2B4A"/>
+                  <a:srgbClr val="0A3D2A"/>
                 </a:solidFill>
                 <a:latin typeface="Noto Sans CJK KR"/>
                 <a:ea typeface="Noto Sans CJK KR"/>
@@ -30110,7 +30110,7 @@
             <a:r>
               <a:rPr sz="950" b="1">
                 <a:solidFill>
-                  <a:srgbClr val="1A2B4A"/>
+                  <a:srgbClr val="0A3D2A"/>
                 </a:solidFill>
                 <a:latin typeface="Noto Sans CJK KR"/>
                 <a:ea typeface="Noto Sans CJK KR"/>
@@ -30276,7 +30276,7 @@
             <a:r>
               <a:rPr sz="950" b="1">
                 <a:solidFill>
-                  <a:srgbClr val="1A2B4A"/>
+                  <a:srgbClr val="0A3D2A"/>
                 </a:solidFill>
                 <a:latin typeface="Noto Sans CJK KR"/>
                 <a:ea typeface="Noto Sans CJK KR"/>
@@ -30442,7 +30442,7 @@
             <a:r>
               <a:rPr sz="950" b="1">
                 <a:solidFill>
-                  <a:srgbClr val="1A2B4A"/>
+                  <a:srgbClr val="0A3D2A"/>
                 </a:solidFill>
                 <a:latin typeface="Noto Sans CJK KR"/>
                 <a:ea typeface="Noto Sans CJK KR"/>
@@ -30608,7 +30608,7 @@
             <a:r>
               <a:rPr sz="950" b="1">
                 <a:solidFill>
-                  <a:srgbClr val="1A2B4A"/>
+                  <a:srgbClr val="0A3D2A"/>
                 </a:solidFill>
                 <a:latin typeface="Noto Sans CJK KR"/>
                 <a:ea typeface="Noto Sans CJK KR"/>
@@ -30772,7 +30772,7 @@
             <a:r>
               <a:rPr sz="1000" b="1">
                 <a:solidFill>
-                  <a:srgbClr val="1A2B4A"/>
+                  <a:srgbClr val="0A3D2A"/>
                 </a:solidFill>
                 <a:latin typeface="Noto Sans CJK KR"/>
                 <a:ea typeface="Noto Sans CJK KR"/>
@@ -30812,7 +30812,7 @@
             <a:r>
               <a:rPr sz="1000" b="1">
                 <a:solidFill>
-                  <a:srgbClr val="1A2B4A"/>
+                  <a:srgbClr val="0A3D2A"/>
                 </a:solidFill>
                 <a:latin typeface="Noto Sans CJK KR"/>
                 <a:ea typeface="Noto Sans CJK KR"/>
@@ -30981,7 +30981,7 @@
                 <a:latin typeface="Noto Sans CJK KR"/>
                 <a:ea typeface="Noto Sans CJK KR"/>
               </a:rPr>
-              <a:t>v1.4 · 500부 견적 요청    |    8 / 16</a:t>
+              <a:t>v1.4.2 · 500부 견적 요청    |    8 / 16</a:t>
             </a:r>
           </a:p>
         </p:txBody>
@@ -31118,7 +31118,7 @@
             <a:r>
               <a:rPr sz="2400" b="1">
                 <a:solidFill>
-                  <a:srgbClr val="1A2B4A"/>
+                  <a:srgbClr val="0A3D2A"/>
                 </a:solidFill>
                 <a:latin typeface="Noto Sans CJK KR"/>
                 <a:ea typeface="Noto Sans CJK KR"/>
@@ -31183,7 +31183,7 @@
             <a:avLst/>
           </a:prstGeom>
           <a:solidFill>
-            <a:srgbClr val="1A2B4A"/>
+            <a:srgbClr val="0A3D2A"/>
           </a:solidFill>
           <a:ln>
             <a:noFill/>
@@ -31375,7 +31375,7 @@
                 <a:latin typeface="Noto Sans CJK KR"/>
                 <a:ea typeface="Noto Sans CJK KR"/>
               </a:rPr>
-              <a:t>사용자가 리포트 결과를 손으로 자기 다이어리에 옮겨 적는 의식 — 자기 관련 기억 +α (Mueller &amp; Oppenheimer, 2014)</a:t>
+              <a:t>사용자가 리포트 결과를 손으로 자기 다이어리에 옮겨 적는 의식 — 자기 관련 기억 강화 (인지심리학 연구)</a:t>
             </a:r>
           </a:p>
         </p:txBody>
@@ -31410,7 +31410,7 @@
             <a:r>
               <a:rPr sz="1200" b="1">
                 <a:solidFill>
-                  <a:srgbClr val="1A2B4A"/>
+                  <a:srgbClr val="0A3D2A"/>
                 </a:solidFill>
                 <a:latin typeface="Noto Sans CJK KR"/>
                 <a:ea typeface="Noto Sans CJK KR"/>
@@ -32144,7 +32144,7 @@
             <a:r>
               <a:rPr sz="1200" b="1">
                 <a:solidFill>
-                  <a:srgbClr val="1A2B4A"/>
+                  <a:srgbClr val="0A3D2A"/>
                 </a:solidFill>
                 <a:latin typeface="Noto Sans CJK KR"/>
                 <a:ea typeface="Noto Sans CJK KR"/>
@@ -32426,7 +32426,7 @@
                 <a:latin typeface="Noto Sans CJK KR"/>
                 <a:ea typeface="Noto Sans CJK KR"/>
               </a:rPr>
-              <a:t>v1.4 · 500부 견적 요청    |    9 / 16</a:t>
+              <a:t>v1.4.2 · 500부 견적 요청    |    9 / 16</a:t>
             </a:r>
           </a:p>
         </p:txBody>
